--- a/Groupes/Voleurs Corbeaux de minuit/Documents pour le jeu/Carte des coffres.pptx
+++ b/Groupes/Voleurs Corbeaux de minuit/Documents pour le jeu/Carte des coffres.pptx
@@ -5,10 +5,11 @@
     <p:sldMasterId id="2147483648" r:id="rId1"/>
   </p:sldMasterIdLst>
   <p:notesMasterIdLst>
-    <p:notesMasterId r:id="rId3"/>
+    <p:notesMasterId r:id="rId4"/>
   </p:notesMasterIdLst>
   <p:sldIdLst>
     <p:sldId id="257" r:id="rId2"/>
+    <p:sldId id="258" r:id="rId3"/>
   </p:sldIdLst>
   <p:sldSz cx="12192000" cy="6858000"/>
   <p:notesSz cx="6858000" cy="9144000"/>
@@ -118,7 +119,7 @@
 <file path=ppt/revisionInfo.xml><?xml version="1.0" encoding="utf-8"?>
 <p1510:revInfo xmlns:a="http://schemas.openxmlformats.org/drawingml/2006/main" xmlns:r="http://schemas.openxmlformats.org/officeDocument/2006/relationships" xmlns:p1510="http://schemas.microsoft.com/office/powerpoint/2015/10/main">
   <p1510:revLst>
-    <p1510:client id="{C0FA041F-38B5-46EC-96CD-F158F016DD51}" v="2" dt="2026-04-04T09:54:03.903"/>
+    <p1510:client id="{541F2838-7EEC-492B-873E-355EEBD32A6C}" v="1" dt="2026-06-26T15:27:23.815"/>
   </p1510:revLst>
 </p1510:revInfo>
 </file>
@@ -126,90 +127,26 @@
 <file path=ppt/changesInfos/changesInfo1.xml><?xml version="1.0" encoding="utf-8"?>
 <pc:chgInfo xmlns:a="http://schemas.openxmlformats.org/drawingml/2006/main" xmlns:r="http://schemas.openxmlformats.org/officeDocument/2006/relationships" xmlns:ac="http://schemas.microsoft.com/office/drawing/2013/main/command" xmlns:pc="http://schemas.microsoft.com/office/powerpoint/2013/main/command">
   <pc:docChgLst>
-    <pc:chgData name="LEDREUX Christophe" userId="25fb9e8f-a08b-443b-847d-7235dba123a2" providerId="ADAL" clId="{A876608C-F1AE-422C-926A-D547A3E0AF9F}"/>
-    <pc:docChg chg="custSel modSld">
-      <pc:chgData name="LEDREUX Christophe" userId="25fb9e8f-a08b-443b-847d-7235dba123a2" providerId="ADAL" clId="{A876608C-F1AE-422C-926A-D547A3E0AF9F}" dt="2026-04-04T09:54:38.559" v="45" actId="113"/>
+    <pc:chgData name="Sébastien Dury" userId="d8cfc095-b667-4ecf-8cea-02e4a80f4560" providerId="ADAL" clId="{C8EB9285-B058-4302-AB4B-E2874A1EEDE0}"/>
+    <pc:docChg chg="custSel addSld modSld">
+      <pc:chgData name="Sébastien Dury" userId="d8cfc095-b667-4ecf-8cea-02e4a80f4560" providerId="ADAL" clId="{C8EB9285-B058-4302-AB4B-E2874A1EEDE0}" dt="2026-06-26T15:27:27.817" v="1" actId="478"/>
       <pc:docMkLst>
         <pc:docMk/>
       </pc:docMkLst>
-      <pc:sldChg chg="addSp delSp modSp mod setBg">
-        <pc:chgData name="LEDREUX Christophe" userId="25fb9e8f-a08b-443b-847d-7235dba123a2" providerId="ADAL" clId="{A876608C-F1AE-422C-926A-D547A3E0AF9F}" dt="2026-04-04T09:54:38.559" v="45" actId="113"/>
+      <pc:sldChg chg="delSp add mod setBg">
+        <pc:chgData name="Sébastien Dury" userId="d8cfc095-b667-4ecf-8cea-02e4a80f4560" providerId="ADAL" clId="{C8EB9285-B058-4302-AB4B-E2874A1EEDE0}" dt="2026-06-26T15:27:27.817" v="1" actId="478"/>
         <pc:sldMkLst>
           <pc:docMk/>
-          <pc:sldMk cId="0" sldId="257"/>
+          <pc:sldMk cId="1846249872" sldId="258"/>
         </pc:sldMkLst>
-        <pc:spChg chg="mod">
-          <ac:chgData name="LEDREUX Christophe" userId="25fb9e8f-a08b-443b-847d-7235dba123a2" providerId="ADAL" clId="{A876608C-F1AE-422C-926A-D547A3E0AF9F}" dt="2026-04-04T09:54:02.436" v="19" actId="1076"/>
+        <pc:spChg chg="del">
+          <ac:chgData name="Sébastien Dury" userId="d8cfc095-b667-4ecf-8cea-02e4a80f4560" providerId="ADAL" clId="{C8EB9285-B058-4302-AB4B-E2874A1EEDE0}" dt="2026-06-26T15:27:27.817" v="1" actId="478"/>
           <ac:spMkLst>
             <pc:docMk/>
-            <pc:sldMk cId="0" sldId="257"/>
-            <ac:spMk id="3" creationId="{7DB99F58-3805-EA19-2A75-3438C50A0484}"/>
+            <pc:sldMk cId="1846249872" sldId="258"/>
+            <ac:spMk id="13" creationId="{448561B1-FB47-2A61-FFCE-E33078C081ED}"/>
           </ac:spMkLst>
         </pc:spChg>
-        <pc:spChg chg="mod">
-          <ac:chgData name="LEDREUX Christophe" userId="25fb9e8f-a08b-443b-847d-7235dba123a2" providerId="ADAL" clId="{A876608C-F1AE-422C-926A-D547A3E0AF9F}" dt="2026-04-04T09:54:38.559" v="45" actId="113"/>
-          <ac:spMkLst>
-            <pc:docMk/>
-            <pc:sldMk cId="0" sldId="257"/>
-            <ac:spMk id="5" creationId="{1DC5C2FC-5173-C4AE-2C32-B42FB6D0BC28}"/>
-          </ac:spMkLst>
-        </pc:spChg>
-        <pc:spChg chg="mod">
-          <ac:chgData name="LEDREUX Christophe" userId="25fb9e8f-a08b-443b-847d-7235dba123a2" providerId="ADAL" clId="{A876608C-F1AE-422C-926A-D547A3E0AF9F}" dt="2026-04-04T09:54:38.559" v="45" actId="113"/>
-          <ac:spMkLst>
-            <pc:docMk/>
-            <pc:sldMk cId="0" sldId="257"/>
-            <ac:spMk id="6" creationId="{255F6F6D-0600-9068-66FC-E66E3E4B0E13}"/>
-          </ac:spMkLst>
-        </pc:spChg>
-        <pc:spChg chg="add del mod">
-          <ac:chgData name="LEDREUX Christophe" userId="25fb9e8f-a08b-443b-847d-7235dba123a2" providerId="ADAL" clId="{A876608C-F1AE-422C-926A-D547A3E0AF9F}" dt="2026-04-04T09:53:53.324" v="18" actId="478"/>
-          <ac:spMkLst>
-            <pc:docMk/>
-            <pc:sldMk cId="0" sldId="257"/>
-            <ac:spMk id="7" creationId="{9152857F-952B-A8C4-8644-4E522A1495FC}"/>
-          </ac:spMkLst>
-        </pc:spChg>
-        <pc:spChg chg="add mod">
-          <ac:chgData name="LEDREUX Christophe" userId="25fb9e8f-a08b-443b-847d-7235dba123a2" providerId="ADAL" clId="{A876608C-F1AE-422C-926A-D547A3E0AF9F}" dt="2026-04-04T09:54:32.596" v="43" actId="1076"/>
-          <ac:spMkLst>
-            <pc:docMk/>
-            <pc:sldMk cId="0" sldId="257"/>
-            <ac:spMk id="8" creationId="{9E718AB7-7E72-C136-20B0-03E3388F95AD}"/>
-          </ac:spMkLst>
-        </pc:spChg>
-        <pc:spChg chg="mod">
-          <ac:chgData name="LEDREUX Christophe" userId="25fb9e8f-a08b-443b-847d-7235dba123a2" providerId="ADAL" clId="{A876608C-F1AE-422C-926A-D547A3E0AF9F}" dt="2026-04-04T09:54:38.559" v="45" actId="113"/>
-          <ac:spMkLst>
-            <pc:docMk/>
-            <pc:sldMk cId="0" sldId="257"/>
-            <ac:spMk id="12" creationId="{08DBBCCA-9643-73D9-0339-6C1CE4EDCA07}"/>
-          </ac:spMkLst>
-        </pc:spChg>
-        <pc:spChg chg="mod">
-          <ac:chgData name="LEDREUX Christophe" userId="25fb9e8f-a08b-443b-847d-7235dba123a2" providerId="ADAL" clId="{A876608C-F1AE-422C-926A-D547A3E0AF9F}" dt="2026-03-29T12:42:11.404" v="6" actId="20577"/>
-          <ac:spMkLst>
-            <pc:docMk/>
-            <pc:sldMk cId="0" sldId="257"/>
-            <ac:spMk id="13" creationId="{637A13C6-BC8C-08C1-96ED-AF2D32419801}"/>
-          </ac:spMkLst>
-        </pc:spChg>
-        <pc:picChg chg="add mod ord">
-          <ac:chgData name="LEDREUX Christophe" userId="25fb9e8f-a08b-443b-847d-7235dba123a2" providerId="ADAL" clId="{A876608C-F1AE-422C-926A-D547A3E0AF9F}" dt="2026-04-04T09:53:38.228" v="15" actId="29295"/>
-          <ac:picMkLst>
-            <pc:docMk/>
-            <pc:sldMk cId="0" sldId="257"/>
-            <ac:picMk id="4" creationId="{4A7AF870-2221-5801-5A17-C72F358E9557}"/>
-          </ac:picMkLst>
-        </pc:picChg>
-        <pc:picChg chg="del">
-          <ac:chgData name="LEDREUX Christophe" userId="25fb9e8f-a08b-443b-847d-7235dba123a2" providerId="ADAL" clId="{A876608C-F1AE-422C-926A-D547A3E0AF9F}" dt="2026-04-04T09:53:14.781" v="11" actId="478"/>
-          <ac:picMkLst>
-            <pc:docMk/>
-            <pc:sldMk cId="0" sldId="257"/>
-            <ac:picMk id="84" creationId="{00000000-0000-0000-0000-000000000000}"/>
-          </ac:picMkLst>
-        </pc:picChg>
       </pc:sldChg>
     </pc:docChg>
   </pc:docChgLst>
@@ -298,7 +235,7 @@
           <a:p>
             <a:fld id="{1FCD2E19-4E3C-40E1-A5E8-DD53F21D46DA}" type="datetimeFigureOut">
               <a:rPr lang="fr-FR" smtClean="0"/>
-              <a:t>04/04/2026</a:t>
+              <a:t>26/06/2026</a:t>
             </a:fld>
             <a:endParaRPr lang="fr-FR"/>
           </a:p>
@@ -456,7 +393,7 @@
           <a:p>
             <a:fld id="{2ADABFFA-FC27-4851-B3D7-9C0ADE4F5518}" type="slidenum">
               <a:rPr lang="fr-FR" smtClean="0"/>
-              <a:t>‹N°›</a:t>
+              <a:t>‹#›</a:t>
             </a:fld>
             <a:endParaRPr lang="fr-FR"/>
           </a:p>
@@ -669,6 +606,133 @@
 </p:notes>
 </file>
 
+<file path=ppt/notesSlides/notesSlide2.xml><?xml version="1.0" encoding="utf-8"?>
+<p:notes xmlns:a="http://schemas.openxmlformats.org/drawingml/2006/main" xmlns:r="http://schemas.openxmlformats.org/officeDocument/2006/relationships" xmlns:p="http://schemas.openxmlformats.org/presentationml/2006/main" showMasterSp="0" showMasterPhAnim="0">
+  <p:cSld>
+    <p:spTree>
+      <p:nvGrpSpPr>
+        <p:cNvPr id="1" name="Shape 80">
+          <a:extLst>
+            <a:ext uri="{FF2B5EF4-FFF2-40B4-BE49-F238E27FC236}">
+              <a16:creationId xmlns:a16="http://schemas.microsoft.com/office/drawing/2014/main" id="{682F0F5C-7824-23F7-EBD5-42A9AE7F9A4C}"/>
+            </a:ext>
+          </a:extLst>
+        </p:cNvPr>
+        <p:cNvGrpSpPr/>
+        <p:nvPr/>
+      </p:nvGrpSpPr>
+      <p:grpSpPr>
+        <a:xfrm>
+          <a:off x="0" y="0"/>
+          <a:ext cx="0" cy="0"/>
+          <a:chOff x="0" y="0"/>
+          <a:chExt cx="0" cy="0"/>
+        </a:xfrm>
+      </p:grpSpPr>
+      <p:sp>
+        <p:nvSpPr>
+          <p:cNvPr id="81" name="Google Shape;81;p1:notes">
+            <a:extLst>
+              <a:ext uri="{FF2B5EF4-FFF2-40B4-BE49-F238E27FC236}">
+                <a16:creationId xmlns:a16="http://schemas.microsoft.com/office/drawing/2014/main" id="{198E79B2-6A18-E67C-6C7D-FF14DAC45FCE}"/>
+              </a:ext>
+            </a:extLst>
+          </p:cNvPr>
+          <p:cNvSpPr txBox="1">
+            <a:spLocks noGrp="1"/>
+          </p:cNvSpPr>
+          <p:nvPr>
+            <p:ph type="body" idx="1"/>
+          </p:nvPr>
+        </p:nvSpPr>
+        <p:spPr>
+          <a:xfrm>
+            <a:off x="685800" y="4343400"/>
+            <a:ext cx="5486400" cy="4114800"/>
+          </a:xfrm>
+          <a:prstGeom prst="rect">
+            <a:avLst/>
+          </a:prstGeom>
+        </p:spPr>
+        <p:txBody>
+          <a:bodyPr spcFirstLastPara="1" wrap="square" lIns="91425" tIns="91425" rIns="91425" bIns="91425" anchor="t" anchorCtr="0">
+            <a:noAutofit/>
+          </a:bodyPr>
+          <a:lstStyle/>
+          <a:p>
+            <a:pPr marL="0" lvl="0" indent="0" algn="l" rtl="0">
+              <a:spcBef>
+                <a:spcPts val="0"/>
+              </a:spcBef>
+              <a:spcAft>
+                <a:spcPts val="0"/>
+              </a:spcAft>
+              <a:buNone/>
+            </a:pPr>
+            <a:endParaRPr/>
+          </a:p>
+        </p:txBody>
+      </p:sp>
+      <p:sp>
+        <p:nvSpPr>
+          <p:cNvPr id="82" name="Google Shape;82;p1:notes">
+            <a:extLst>
+              <a:ext uri="{FF2B5EF4-FFF2-40B4-BE49-F238E27FC236}">
+                <a16:creationId xmlns:a16="http://schemas.microsoft.com/office/drawing/2014/main" id="{339BAB3A-0BAC-D758-0C72-2CB9D5751E3A}"/>
+              </a:ext>
+            </a:extLst>
+          </p:cNvPr>
+          <p:cNvSpPr>
+            <a:spLocks noGrp="1" noRot="1" noChangeAspect="1"/>
+          </p:cNvSpPr>
+          <p:nvPr>
+            <p:ph type="sldImg" idx="2"/>
+          </p:nvPr>
+        </p:nvSpPr>
+        <p:spPr>
+          <a:xfrm>
+            <a:off x="381000" y="685800"/>
+            <a:ext cx="6096000" cy="3429000"/>
+          </a:xfrm>
+          <a:custGeom>
+            <a:avLst/>
+            <a:gdLst/>
+            <a:ahLst/>
+            <a:cxnLst/>
+            <a:rect l="l" t="t" r="r" b="b"/>
+            <a:pathLst>
+              <a:path w="120000" h="120000" extrusionOk="0">
+                <a:moveTo>
+                  <a:pt x="0" y="0"/>
+                </a:moveTo>
+                <a:lnTo>
+                  <a:pt x="120000" y="0"/>
+                </a:lnTo>
+                <a:lnTo>
+                  <a:pt x="120000" y="120000"/>
+                </a:lnTo>
+                <a:lnTo>
+                  <a:pt x="0" y="120000"/>
+                </a:lnTo>
+                <a:close/>
+              </a:path>
+            </a:pathLst>
+          </a:custGeom>
+        </p:spPr>
+      </p:sp>
+    </p:spTree>
+    <p:extLst>
+      <p:ext uri="{BB962C8B-B14F-4D97-AF65-F5344CB8AC3E}">
+        <p14:creationId xmlns:p14="http://schemas.microsoft.com/office/powerpoint/2010/main" val="2525409132"/>
+      </p:ext>
+    </p:extLst>
+  </p:cSld>
+  <p:clrMapOvr>
+    <a:masterClrMapping/>
+  </p:clrMapOvr>
+</p:notes>
+</file>
+
 <file path=ppt/slideLayouts/slideLayout1.xml><?xml version="1.0" encoding="utf-8"?>
 <p:sldLayout xmlns:a="http://schemas.openxmlformats.org/drawingml/2006/main" xmlns:r="http://schemas.openxmlformats.org/officeDocument/2006/relationships" xmlns:p="http://schemas.openxmlformats.org/presentationml/2006/main" type="title" preserve="1">
   <p:cSld name="Diapositive de titre">
@@ -816,7 +880,7 @@
           <a:p>
             <a:fld id="{92EC0475-6E87-4325-ABF1-AC12CCE34ADE}" type="datetimeFigureOut">
               <a:rPr lang="fr-FR" smtClean="0"/>
-              <a:t>04/04/2026</a:t>
+              <a:t>26/06/2026</a:t>
             </a:fld>
             <a:endParaRPr lang="fr-FR"/>
           </a:p>
@@ -870,7 +934,7 @@
           <a:p>
             <a:fld id="{64DEDC79-DD16-49DC-AB40-EE42C2746671}" type="slidenum">
               <a:rPr lang="fr-FR" smtClean="0"/>
-              <a:t>‹N°›</a:t>
+              <a:t>‹#›</a:t>
             </a:fld>
             <a:endParaRPr lang="fr-FR"/>
           </a:p>
@@ -1014,7 +1078,7 @@
           <a:p>
             <a:fld id="{92EC0475-6E87-4325-ABF1-AC12CCE34ADE}" type="datetimeFigureOut">
               <a:rPr lang="fr-FR" smtClean="0"/>
-              <a:t>04/04/2026</a:t>
+              <a:t>26/06/2026</a:t>
             </a:fld>
             <a:endParaRPr lang="fr-FR"/>
           </a:p>
@@ -1068,7 +1132,7 @@
           <a:p>
             <a:fld id="{64DEDC79-DD16-49DC-AB40-EE42C2746671}" type="slidenum">
               <a:rPr lang="fr-FR" smtClean="0"/>
-              <a:t>‹N°›</a:t>
+              <a:t>‹#›</a:t>
             </a:fld>
             <a:endParaRPr lang="fr-FR"/>
           </a:p>
@@ -1222,7 +1286,7 @@
           <a:p>
             <a:fld id="{92EC0475-6E87-4325-ABF1-AC12CCE34ADE}" type="datetimeFigureOut">
               <a:rPr lang="fr-FR" smtClean="0"/>
-              <a:t>04/04/2026</a:t>
+              <a:t>26/06/2026</a:t>
             </a:fld>
             <a:endParaRPr lang="fr-FR"/>
           </a:p>
@@ -1276,7 +1340,7 @@
           <a:p>
             <a:fld id="{64DEDC79-DD16-49DC-AB40-EE42C2746671}" type="slidenum">
               <a:rPr lang="fr-FR" smtClean="0"/>
-              <a:t>‹N°›</a:t>
+              <a:t>‹#›</a:t>
             </a:fld>
             <a:endParaRPr lang="fr-FR"/>
           </a:p>
@@ -1420,7 +1484,7 @@
           <a:p>
             <a:fld id="{92EC0475-6E87-4325-ABF1-AC12CCE34ADE}" type="datetimeFigureOut">
               <a:rPr lang="fr-FR" smtClean="0"/>
-              <a:t>04/04/2026</a:t>
+              <a:t>26/06/2026</a:t>
             </a:fld>
             <a:endParaRPr lang="fr-FR"/>
           </a:p>
@@ -1474,7 +1538,7 @@
           <a:p>
             <a:fld id="{64DEDC79-DD16-49DC-AB40-EE42C2746671}" type="slidenum">
               <a:rPr lang="fr-FR" smtClean="0"/>
-              <a:t>‹N°›</a:t>
+              <a:t>‹#›</a:t>
             </a:fld>
             <a:endParaRPr lang="fr-FR"/>
           </a:p>
@@ -1695,7 +1759,7 @@
           <a:p>
             <a:fld id="{92EC0475-6E87-4325-ABF1-AC12CCE34ADE}" type="datetimeFigureOut">
               <a:rPr lang="fr-FR" smtClean="0"/>
-              <a:t>04/04/2026</a:t>
+              <a:t>26/06/2026</a:t>
             </a:fld>
             <a:endParaRPr lang="fr-FR"/>
           </a:p>
@@ -1749,7 +1813,7 @@
           <a:p>
             <a:fld id="{64DEDC79-DD16-49DC-AB40-EE42C2746671}" type="slidenum">
               <a:rPr lang="fr-FR" smtClean="0"/>
-              <a:t>‹N°›</a:t>
+              <a:t>‹#›</a:t>
             </a:fld>
             <a:endParaRPr lang="fr-FR"/>
           </a:p>
@@ -1960,7 +2024,7 @@
           <a:p>
             <a:fld id="{92EC0475-6E87-4325-ABF1-AC12CCE34ADE}" type="datetimeFigureOut">
               <a:rPr lang="fr-FR" smtClean="0"/>
-              <a:t>04/04/2026</a:t>
+              <a:t>26/06/2026</a:t>
             </a:fld>
             <a:endParaRPr lang="fr-FR"/>
           </a:p>
@@ -2014,7 +2078,7 @@
           <a:p>
             <a:fld id="{64DEDC79-DD16-49DC-AB40-EE42C2746671}" type="slidenum">
               <a:rPr lang="fr-FR" smtClean="0"/>
-              <a:t>‹N°›</a:t>
+              <a:t>‹#›</a:t>
             </a:fld>
             <a:endParaRPr lang="fr-FR"/>
           </a:p>
@@ -2372,7 +2436,7 @@
           <a:p>
             <a:fld id="{92EC0475-6E87-4325-ABF1-AC12CCE34ADE}" type="datetimeFigureOut">
               <a:rPr lang="fr-FR" smtClean="0"/>
-              <a:t>04/04/2026</a:t>
+              <a:t>26/06/2026</a:t>
             </a:fld>
             <a:endParaRPr lang="fr-FR"/>
           </a:p>
@@ -2426,7 +2490,7 @@
           <a:p>
             <a:fld id="{64DEDC79-DD16-49DC-AB40-EE42C2746671}" type="slidenum">
               <a:rPr lang="fr-FR" smtClean="0"/>
-              <a:t>‹N°›</a:t>
+              <a:t>‹#›</a:t>
             </a:fld>
             <a:endParaRPr lang="fr-FR"/>
           </a:p>
@@ -2513,7 +2577,7 @@
           <a:p>
             <a:fld id="{92EC0475-6E87-4325-ABF1-AC12CCE34ADE}" type="datetimeFigureOut">
               <a:rPr lang="fr-FR" smtClean="0"/>
-              <a:t>04/04/2026</a:t>
+              <a:t>26/06/2026</a:t>
             </a:fld>
             <a:endParaRPr lang="fr-FR"/>
           </a:p>
@@ -2567,7 +2631,7 @@
           <a:p>
             <a:fld id="{64DEDC79-DD16-49DC-AB40-EE42C2746671}" type="slidenum">
               <a:rPr lang="fr-FR" smtClean="0"/>
-              <a:t>‹N°›</a:t>
+              <a:t>‹#›</a:t>
             </a:fld>
             <a:endParaRPr lang="fr-FR"/>
           </a:p>
@@ -2626,7 +2690,7 @@
           <a:p>
             <a:fld id="{92EC0475-6E87-4325-ABF1-AC12CCE34ADE}" type="datetimeFigureOut">
               <a:rPr lang="fr-FR" smtClean="0"/>
-              <a:t>04/04/2026</a:t>
+              <a:t>26/06/2026</a:t>
             </a:fld>
             <a:endParaRPr lang="fr-FR"/>
           </a:p>
@@ -2680,7 +2744,7 @@
           <a:p>
             <a:fld id="{64DEDC79-DD16-49DC-AB40-EE42C2746671}" type="slidenum">
               <a:rPr lang="fr-FR" smtClean="0"/>
-              <a:t>‹N°›</a:t>
+              <a:t>‹#›</a:t>
             </a:fld>
             <a:endParaRPr lang="fr-FR"/>
           </a:p>
@@ -2937,7 +3001,7 @@
           <a:p>
             <a:fld id="{92EC0475-6E87-4325-ABF1-AC12CCE34ADE}" type="datetimeFigureOut">
               <a:rPr lang="fr-FR" smtClean="0"/>
-              <a:t>04/04/2026</a:t>
+              <a:t>26/06/2026</a:t>
             </a:fld>
             <a:endParaRPr lang="fr-FR"/>
           </a:p>
@@ -2991,7 +3055,7 @@
           <a:p>
             <a:fld id="{64DEDC79-DD16-49DC-AB40-EE42C2746671}" type="slidenum">
               <a:rPr lang="fr-FR" smtClean="0"/>
-              <a:t>‹N°›</a:t>
+              <a:t>‹#›</a:t>
             </a:fld>
             <a:endParaRPr lang="fr-FR"/>
           </a:p>
@@ -3225,7 +3289,7 @@
           <a:p>
             <a:fld id="{92EC0475-6E87-4325-ABF1-AC12CCE34ADE}" type="datetimeFigureOut">
               <a:rPr lang="fr-FR" smtClean="0"/>
-              <a:t>04/04/2026</a:t>
+              <a:t>26/06/2026</a:t>
             </a:fld>
             <a:endParaRPr lang="fr-FR"/>
           </a:p>
@@ -3279,7 +3343,7 @@
           <a:p>
             <a:fld id="{64DEDC79-DD16-49DC-AB40-EE42C2746671}" type="slidenum">
               <a:rPr lang="fr-FR" smtClean="0"/>
-              <a:t>‹N°›</a:t>
+              <a:t>‹#›</a:t>
             </a:fld>
             <a:endParaRPr lang="fr-FR"/>
           </a:p>
@@ -3466,7 +3530,7 @@
           <a:p>
             <a:fld id="{92EC0475-6E87-4325-ABF1-AC12CCE34ADE}" type="datetimeFigureOut">
               <a:rPr lang="fr-FR" smtClean="0"/>
-              <a:t>04/04/2026</a:t>
+              <a:t>26/06/2026</a:t>
             </a:fld>
             <a:endParaRPr lang="fr-FR"/>
           </a:p>
@@ -3556,7 +3620,7 @@
           <a:p>
             <a:fld id="{64DEDC79-DD16-49DC-AB40-EE42C2746671}" type="slidenum">
               <a:rPr lang="fr-FR" smtClean="0"/>
-              <a:t>‹N°›</a:t>
+              <a:t>‹#›</a:t>
             </a:fld>
             <a:endParaRPr lang="fr-FR"/>
           </a:p>
@@ -4191,6 +4255,259 @@
         </p:txBody>
       </p:sp>
     </p:spTree>
+  </p:cSld>
+  <p:clrMapOvr>
+    <a:masterClrMapping/>
+  </p:clrMapOvr>
+</p:sld>
+</file>
+
+<file path=ppt/slides/slide2.xml><?xml version="1.0" encoding="utf-8"?>
+<p:sld xmlns:a="http://schemas.openxmlformats.org/drawingml/2006/main" xmlns:r="http://schemas.openxmlformats.org/officeDocument/2006/relationships" xmlns:p="http://schemas.openxmlformats.org/presentationml/2006/main">
+  <p:cSld>
+    <p:spTree>
+      <p:nvGrpSpPr>
+        <p:cNvPr id="1" name="Shape 83">
+          <a:extLst>
+            <a:ext uri="{FF2B5EF4-FFF2-40B4-BE49-F238E27FC236}">
+              <a16:creationId xmlns:a16="http://schemas.microsoft.com/office/drawing/2014/main" id="{FED309CF-39B2-2613-4AEE-E96473D270B8}"/>
+            </a:ext>
+          </a:extLst>
+        </p:cNvPr>
+        <p:cNvGrpSpPr/>
+        <p:nvPr/>
+      </p:nvGrpSpPr>
+      <p:grpSpPr>
+        <a:xfrm>
+          <a:off x="0" y="0"/>
+          <a:ext cx="0" cy="0"/>
+          <a:chOff x="0" y="0"/>
+          <a:chExt cx="0" cy="0"/>
+        </a:xfrm>
+      </p:grpSpPr>
+      <p:pic>
+        <p:nvPicPr>
+          <p:cNvPr id="4" name="Image 3">
+            <a:extLst>
+              <a:ext uri="{FF2B5EF4-FFF2-40B4-BE49-F238E27FC236}">
+                <a16:creationId xmlns:a16="http://schemas.microsoft.com/office/drawing/2014/main" id="{54EA4483-B789-D6AF-6F8C-F7237D562BD4}"/>
+              </a:ext>
+            </a:extLst>
+          </p:cNvPr>
+          <p:cNvPicPr>
+            <a:picLocks noChangeAspect="1"/>
+          </p:cNvPicPr>
+          <p:nvPr/>
+        </p:nvPicPr>
+        <p:blipFill>
+          <a:blip r:embed="rId3">
+            <a:alphaModFix amt="70000"/>
+          </a:blip>
+          <a:stretch>
+            <a:fillRect/>
+          </a:stretch>
+        </p:blipFill>
+        <p:spPr>
+          <a:xfrm>
+            <a:off x="0" y="6788"/>
+            <a:ext cx="9146541" cy="6851211"/>
+          </a:xfrm>
+          <a:prstGeom prst="rect">
+            <a:avLst/>
+          </a:prstGeom>
+        </p:spPr>
+      </p:pic>
+      <p:sp>
+        <p:nvSpPr>
+          <p:cNvPr id="3" name="ZoneTexte 2">
+            <a:extLst>
+              <a:ext uri="{FF2B5EF4-FFF2-40B4-BE49-F238E27FC236}">
+                <a16:creationId xmlns:a16="http://schemas.microsoft.com/office/drawing/2014/main" id="{EA81B29D-D9BB-9A21-A849-311B3B787F79}"/>
+              </a:ext>
+            </a:extLst>
+          </p:cNvPr>
+          <p:cNvSpPr txBox="1"/>
+          <p:nvPr/>
+        </p:nvSpPr>
+        <p:spPr>
+          <a:xfrm rot="19871694">
+            <a:off x="2820871" y="3845143"/>
+            <a:ext cx="793678" cy="307777"/>
+          </a:xfrm>
+          <a:prstGeom prst="rect">
+            <a:avLst/>
+          </a:prstGeom>
+          <a:noFill/>
+        </p:spPr>
+        <p:txBody>
+          <a:bodyPr wrap="square" rtlCol="0">
+            <a:spAutoFit/>
+          </a:bodyPr>
+          <a:lstStyle/>
+          <a:p>
+            <a:r>
+              <a:rPr lang="fr-FR" sz="1400" b="1" dirty="0">
+                <a:latin typeface="Bradley Hand ITC" panose="03070402050302030203" pitchFamily="66" charset="0"/>
+              </a:rPr>
+              <a:t>Banque</a:t>
+            </a:r>
+          </a:p>
+        </p:txBody>
+      </p:sp>
+      <p:sp>
+        <p:nvSpPr>
+          <p:cNvPr id="5" name="ZoneTexte 4">
+            <a:extLst>
+              <a:ext uri="{FF2B5EF4-FFF2-40B4-BE49-F238E27FC236}">
+                <a16:creationId xmlns:a16="http://schemas.microsoft.com/office/drawing/2014/main" id="{687F1445-42DD-CA4A-CBC6-0191E43F5D27}"/>
+              </a:ext>
+            </a:extLst>
+          </p:cNvPr>
+          <p:cNvSpPr txBox="1"/>
+          <p:nvPr/>
+        </p:nvSpPr>
+        <p:spPr>
+          <a:xfrm rot="19871694">
+            <a:off x="1238204" y="4208731"/>
+            <a:ext cx="1004790" cy="523220"/>
+          </a:xfrm>
+          <a:prstGeom prst="rect">
+            <a:avLst/>
+          </a:prstGeom>
+          <a:noFill/>
+        </p:spPr>
+        <p:txBody>
+          <a:bodyPr wrap="square" rtlCol="0">
+            <a:spAutoFit/>
+          </a:bodyPr>
+          <a:lstStyle/>
+          <a:p>
+            <a:r>
+              <a:rPr lang="fr-FR" sz="1400" b="1" dirty="0">
+                <a:latin typeface="Bradley Hand ITC" panose="03070402050302030203" pitchFamily="66" charset="0"/>
+              </a:rPr>
+              <a:t>Salle des coffres</a:t>
+            </a:r>
+          </a:p>
+        </p:txBody>
+      </p:sp>
+      <p:sp>
+        <p:nvSpPr>
+          <p:cNvPr id="6" name="ZoneTexte 5">
+            <a:extLst>
+              <a:ext uri="{FF2B5EF4-FFF2-40B4-BE49-F238E27FC236}">
+                <a16:creationId xmlns:a16="http://schemas.microsoft.com/office/drawing/2014/main" id="{59C5F516-1B7B-852F-F612-A6C9101006DF}"/>
+              </a:ext>
+            </a:extLst>
+          </p:cNvPr>
+          <p:cNvSpPr txBox="1"/>
+          <p:nvPr/>
+        </p:nvSpPr>
+        <p:spPr>
+          <a:xfrm rot="19871694">
+            <a:off x="1646637" y="4900627"/>
+            <a:ext cx="1004790" cy="523220"/>
+          </a:xfrm>
+          <a:prstGeom prst="rect">
+            <a:avLst/>
+          </a:prstGeom>
+          <a:noFill/>
+        </p:spPr>
+        <p:txBody>
+          <a:bodyPr wrap="square" rtlCol="0">
+            <a:spAutoFit/>
+          </a:bodyPr>
+          <a:lstStyle/>
+          <a:p>
+            <a:r>
+              <a:rPr lang="fr-FR" sz="1400" b="1" dirty="0">
+                <a:latin typeface="Bradley Hand ITC" panose="03070402050302030203" pitchFamily="66" charset="0"/>
+              </a:rPr>
+              <a:t>Salle des coffres</a:t>
+            </a:r>
+          </a:p>
+        </p:txBody>
+      </p:sp>
+      <p:sp>
+        <p:nvSpPr>
+          <p:cNvPr id="12" name="ZoneTexte 11">
+            <a:extLst>
+              <a:ext uri="{FF2B5EF4-FFF2-40B4-BE49-F238E27FC236}">
+                <a16:creationId xmlns:a16="http://schemas.microsoft.com/office/drawing/2014/main" id="{879457B6-8700-B2A1-FFF3-8FA96BDB7193}"/>
+              </a:ext>
+            </a:extLst>
+          </p:cNvPr>
+          <p:cNvSpPr txBox="1"/>
+          <p:nvPr/>
+        </p:nvSpPr>
+        <p:spPr>
+          <a:xfrm>
+            <a:off x="2715315" y="5300222"/>
+            <a:ext cx="1004790" cy="523220"/>
+          </a:xfrm>
+          <a:prstGeom prst="rect">
+            <a:avLst/>
+          </a:prstGeom>
+          <a:noFill/>
+        </p:spPr>
+        <p:txBody>
+          <a:bodyPr wrap="square" rtlCol="0">
+            <a:spAutoFit/>
+          </a:bodyPr>
+          <a:lstStyle/>
+          <a:p>
+            <a:r>
+              <a:rPr lang="fr-FR" sz="1400" b="1" dirty="0">
+                <a:latin typeface="Bradley Hand ITC" panose="03070402050302030203" pitchFamily="66" charset="0"/>
+              </a:rPr>
+              <a:t>Salle des coffres</a:t>
+            </a:r>
+          </a:p>
+        </p:txBody>
+      </p:sp>
+      <p:sp>
+        <p:nvSpPr>
+          <p:cNvPr id="8" name="ZoneTexte 7">
+            <a:extLst>
+              <a:ext uri="{FF2B5EF4-FFF2-40B4-BE49-F238E27FC236}">
+                <a16:creationId xmlns:a16="http://schemas.microsoft.com/office/drawing/2014/main" id="{7CD4EF6A-D4AE-308A-34E9-4B238B0FF991}"/>
+              </a:ext>
+            </a:extLst>
+          </p:cNvPr>
+          <p:cNvSpPr txBox="1"/>
+          <p:nvPr/>
+        </p:nvSpPr>
+        <p:spPr>
+          <a:xfrm>
+            <a:off x="3323266" y="2436231"/>
+            <a:ext cx="793678" cy="523220"/>
+          </a:xfrm>
+          <a:prstGeom prst="rect">
+            <a:avLst/>
+          </a:prstGeom>
+          <a:noFill/>
+        </p:spPr>
+        <p:txBody>
+          <a:bodyPr wrap="square" rtlCol="0">
+            <a:spAutoFit/>
+          </a:bodyPr>
+          <a:lstStyle/>
+          <a:p>
+            <a:r>
+              <a:rPr lang="fr-FR" sz="1400" b="1" dirty="0">
+                <a:latin typeface="Bradley Hand ITC" panose="03070402050302030203" pitchFamily="66" charset="0"/>
+              </a:rPr>
+              <a:t>Auberge et tripot</a:t>
+            </a:r>
+          </a:p>
+        </p:txBody>
+      </p:sp>
+    </p:spTree>
+    <p:extLst>
+      <p:ext uri="{BB962C8B-B14F-4D97-AF65-F5344CB8AC3E}">
+        <p14:creationId xmlns:p14="http://schemas.microsoft.com/office/powerpoint/2010/main" val="1846249872"/>
+      </p:ext>
+    </p:extLst>
   </p:cSld>
   <p:clrMapOvr>
     <a:masterClrMapping/>
